--- a/report/HCC_gene_expression_presentation.pptx
+++ b/report/HCC_gene_expression_presentation.pptx
@@ -15,6 +15,7 @@
     <p:sldId id="263" r:id="rId9"/>
     <p:sldId id="264" r:id="rId10"/>
     <p:sldId id="265" r:id="rId11"/>
+    <p:sldId id="268" r:id="rId19"/>
     <p:sldId id="266" r:id="rId12"/>
     <p:sldId id="267" r:id="rId13"/>
   </p:sldIdLst>
@@ -2877,6 +2878,1031 @@
 </file>
 
 <file path=ppt/slides/slide11.xml><?xml version="1.0" encoding="utf-8"?>
+<p:sld xmlns:a="http://schemas.openxmlformats.org/drawingml/2006/main" xmlns:p="http://schemas.openxmlformats.org/presentationml/2006/main" xmlns:r="http://schemas.openxmlformats.org/officeDocument/2006/relationships">
+  <p:cSld>
+    <p:spTree>
+      <p:nvGrpSpPr>
+        <p:cNvPr id="1" name=""/>
+        <p:cNvGrpSpPr/>
+        <p:nvPr/>
+      </p:nvGrpSpPr>
+      <p:grpSpPr/>
+      <p:sp>
+        <p:nvSpPr>
+          <p:cNvPr id="2" name="TextBox 1"/>
+          <p:cNvSpPr txBox="1"/>
+          <p:nvPr/>
+        </p:nvSpPr>
+        <p:spPr>
+          <a:xfrm>
+            <a:off x="594360" y="347472"/>
+            <a:ext cx="4754880" cy="320040"/>
+          </a:xfrm>
+          <a:prstGeom prst="rect">
+            <a:avLst/>
+          </a:prstGeom>
+          <a:noFill/>
+        </p:spPr>
+        <p:txBody>
+          <a:bodyPr wrap="square" lIns="45720" rIns="45720">
+            <a:spAutoFit/>
+          </a:bodyPr>
+          <a:lstStyle/>
+          <a:p>
+            <a:pPr algn="l"/>
+            <a:r>
+              <a:rPr sz="1400" b="1">
+                <a:solidFill>
+                  <a:srgbClr val="2563EB"/>
+                </a:solidFill>
+                <a:latin typeface="Aptos"/>
+              </a:rPr>
+              <a:t>Additional analysis</a:t>
+            </a:r>
+          </a:p>
+        </p:txBody>
+      </p:sp>
+      <p:sp>
+        <p:nvSpPr>
+          <p:cNvPr id="3" name="TextBox 2"/>
+          <p:cNvSpPr txBox="1"/>
+          <p:nvPr/>
+        </p:nvSpPr>
+        <p:spPr>
+          <a:xfrm>
+            <a:off x="594360" y="621792"/>
+            <a:ext cx="10241280" cy="475488"/>
+          </a:xfrm>
+          <a:prstGeom prst="rect">
+            <a:avLst/>
+          </a:prstGeom>
+          <a:noFill/>
+        </p:spPr>
+        <p:txBody>
+          <a:bodyPr wrap="square" lIns="45720" rIns="45720">
+            <a:spAutoFit/>
+          </a:bodyPr>
+          <a:lstStyle/>
+          <a:p>
+            <a:pPr algn="l"/>
+            <a:r>
+              <a:rPr sz="2400" b="1">
+                <a:solidFill>
+                  <a:srgbClr val="0B1F33"/>
+                </a:solidFill>
+                <a:latin typeface="Aptos Display"/>
+              </a:rPr>
+              <a:t>Literature-based validation of selected findings</a:t>
+            </a:r>
+          </a:p>
+        </p:txBody>
+      </p:sp>
+      <p:sp>
+        <p:nvSpPr>
+          <p:cNvPr id="4" name="Straight Connector 3"/>
+          <p:cNvSpPr/>
+          <p:nvPr/>
+        </p:nvSpPr>
+        <p:spPr>
+          <a:xfrm>
+            <a:off x="594360" y="1143000"/>
+            <a:ext cx="10972800" cy="0"/>
+          </a:xfrm>
+          <a:prstGeom prst="lineInv">
+            <a:avLst/>
+          </a:prstGeom>
+          <a:ln w="12700">
+            <a:solidFill>
+              <a:srgbClr val="CBD5E1"/>
+            </a:solidFill>
+          </a:ln>
+        </p:spPr>
+        <p:style>
+          <a:lnRef idx="1">
+            <a:schemeClr val="accent1"/>
+          </a:lnRef>
+          <a:fillRef idx="3">
+            <a:schemeClr val="accent1"/>
+          </a:fillRef>
+          <a:effectRef idx="2">
+            <a:schemeClr val="accent1"/>
+          </a:effectRef>
+          <a:fontRef idx="minor">
+            <a:schemeClr val="lt1"/>
+          </a:fontRef>
+        </p:style>
+        <p:txBody>
+          <a:bodyPr rtlCol="0" anchor="ctr"/>
+          <a:lstStyle/>
+          <a:p>
+            <a:pPr algn="ctr"/>
+          </a:p>
+        </p:txBody>
+      </p:sp>
+      <p:sp>
+        <p:nvSpPr>
+          <p:cNvPr id="5" name="TextBox 4"/>
+          <p:cNvSpPr txBox="1"/>
+          <p:nvPr/>
+        </p:nvSpPr>
+        <p:spPr>
+          <a:xfrm>
+            <a:off x="658368" y="1307592"/>
+            <a:ext cx="10515600" cy="411480"/>
+          </a:xfrm>
+          <a:prstGeom prst="rect">
+            <a:avLst/>
+          </a:prstGeom>
+          <a:noFill/>
+        </p:spPr>
+        <p:txBody>
+          <a:bodyPr wrap="square" lIns="45720" rIns="45720">
+            <a:spAutoFit/>
+          </a:bodyPr>
+          <a:lstStyle/>
+          <a:p>
+            <a:pPr algn="l"/>
+            <a:r>
+              <a:rPr sz="1500" b="0">
+                <a:solidFill>
+                  <a:srgbClr val="111827"/>
+                </a:solidFill>
+                <a:latin typeface="Aptos"/>
+              </a:rPr>
+              <a:t>Purpose: check whether the main computational findings are biologically plausible according to previous HCC/cancer literature.</a:t>
+            </a:r>
+          </a:p>
+        </p:txBody>
+      </p:sp>
+      <p:sp>
+        <p:nvSpPr>
+          <p:cNvPr id="6" name="Rounded Rectangle 5"/>
+          <p:cNvSpPr/>
+          <p:nvPr/>
+        </p:nvSpPr>
+        <p:spPr>
+          <a:xfrm>
+            <a:off x="658368" y="1865376"/>
+            <a:ext cx="5074920" cy="1417320"/>
+          </a:xfrm>
+          <a:prstGeom prst="roundRect">
+            <a:avLst/>
+          </a:prstGeom>
+          <a:solidFill>
+            <a:srgbClr val="FDF4FF"/>
+          </a:solidFill>
+          <a:ln w="12700">
+            <a:solidFill>
+              <a:srgbClr val="D946EF"/>
+            </a:solidFill>
+          </a:ln>
+        </p:spPr>
+        <p:style>
+          <a:lnRef idx="1">
+            <a:schemeClr val="accent1"/>
+          </a:lnRef>
+          <a:fillRef idx="3">
+            <a:schemeClr val="accent1"/>
+          </a:fillRef>
+          <a:effectRef idx="2">
+            <a:schemeClr val="accent1"/>
+          </a:effectRef>
+          <a:fontRef idx="minor">
+            <a:schemeClr val="lt1"/>
+          </a:fontRef>
+        </p:style>
+        <p:txBody>
+          <a:bodyPr rtlCol="0" anchor="ctr"/>
+          <a:lstStyle/>
+          <a:p>
+            <a:pPr algn="ctr"/>
+          </a:p>
+        </p:txBody>
+      </p:sp>
+      <p:sp>
+        <p:nvSpPr>
+          <p:cNvPr id="7" name="Rectangle 6"/>
+          <p:cNvSpPr/>
+          <p:nvPr/>
+        </p:nvSpPr>
+        <p:spPr>
+          <a:xfrm>
+            <a:off x="658368" y="1865376"/>
+            <a:ext cx="82296" cy="1417320"/>
+          </a:xfrm>
+          <a:prstGeom prst="rect">
+            <a:avLst/>
+          </a:prstGeom>
+          <a:solidFill>
+            <a:srgbClr val="D946EF"/>
+          </a:solidFill>
+          <a:ln>
+            <a:solidFill>
+              <a:srgbClr val="D946EF"/>
+            </a:solidFill>
+          </a:ln>
+        </p:spPr>
+        <p:style>
+          <a:lnRef idx="1">
+            <a:schemeClr val="accent1"/>
+          </a:lnRef>
+          <a:fillRef idx="3">
+            <a:schemeClr val="accent1"/>
+          </a:fillRef>
+          <a:effectRef idx="2">
+            <a:schemeClr val="accent1"/>
+          </a:effectRef>
+          <a:fontRef idx="minor">
+            <a:schemeClr val="lt1"/>
+          </a:fontRef>
+        </p:style>
+        <p:txBody>
+          <a:bodyPr rtlCol="0" anchor="ctr"/>
+          <a:lstStyle/>
+          <a:p>
+            <a:pPr algn="ctr"/>
+          </a:p>
+        </p:txBody>
+      </p:sp>
+      <p:sp>
+        <p:nvSpPr>
+          <p:cNvPr id="8" name="TextBox 7"/>
+          <p:cNvSpPr txBox="1"/>
+          <p:nvPr/>
+        </p:nvSpPr>
+        <p:spPr>
+          <a:xfrm>
+            <a:off x="822960" y="1975104"/>
+            <a:ext cx="4800600" cy="292608"/>
+          </a:xfrm>
+          <a:prstGeom prst="rect">
+            <a:avLst/>
+          </a:prstGeom>
+          <a:noFill/>
+        </p:spPr>
+        <p:txBody>
+          <a:bodyPr wrap="square" lIns="45720" rIns="45720">
+            <a:spAutoFit/>
+          </a:bodyPr>
+          <a:lstStyle/>
+          <a:p>
+            <a:pPr algn="l"/>
+            <a:r>
+              <a:rPr sz="1600" b="1">
+                <a:solidFill>
+                  <a:srgbClr val="D946EF"/>
+                </a:solidFill>
+                <a:latin typeface="Aptos"/>
+              </a:rPr>
+              <a:t>ZIC2: top UP-regulated gene by logFC</a:t>
+            </a:r>
+          </a:p>
+        </p:txBody>
+      </p:sp>
+      <p:sp>
+        <p:nvSpPr>
+          <p:cNvPr id="9" name="TextBox 8"/>
+          <p:cNvSpPr txBox="1"/>
+          <p:nvPr/>
+        </p:nvSpPr>
+        <p:spPr>
+          <a:xfrm>
+            <a:off x="841248" y="2340864"/>
+            <a:ext cx="4754880" cy="850392"/>
+          </a:xfrm>
+          <a:prstGeom prst="rect">
+            <a:avLst/>
+          </a:prstGeom>
+          <a:noFill/>
+        </p:spPr>
+        <p:txBody>
+          <a:bodyPr wrap="square" lIns="73152" rIns="73152" tIns="27432" bIns="27432">
+            <a:spAutoFit/>
+          </a:bodyPr>
+          <a:lstStyle/>
+          <a:p>
+            <a:pPr>
+              <a:spcAft>
+                <a:spcPts val="400"/>
+              </a:spcAft>
+              <a:defRPr sz="1250">
+                <a:solidFill>
+                  <a:srgbClr val="111827"/>
+                </a:solidFill>
+                <a:latin typeface="Aptos"/>
+              </a:defRPr>
+            </a:pPr>
+            <a:r>
+              <a:t>Reported as a prognostic and immune-response marker in liver cancer/HCC.</a:t>
+            </a:r>
+          </a:p>
+          <a:p>
+            <a:pPr>
+              <a:spcAft>
+                <a:spcPts val="400"/>
+              </a:spcAft>
+              <a:defRPr sz="1250">
+                <a:solidFill>
+                  <a:srgbClr val="111827"/>
+                </a:solidFill>
+                <a:latin typeface="Aptos"/>
+              </a:defRPr>
+            </a:pPr>
+            <a:r>
+              <a:t>Supports the relevance of the strong tumor-up signal.</a:t>
+            </a:r>
+          </a:p>
+        </p:txBody>
+      </p:sp>
+      <p:sp>
+        <p:nvSpPr>
+          <p:cNvPr id="10" name="Rounded Rectangle 9"/>
+          <p:cNvSpPr/>
+          <p:nvPr/>
+        </p:nvSpPr>
+        <p:spPr>
+          <a:xfrm>
+            <a:off x="6199632" y="1865376"/>
+            <a:ext cx="5074920" cy="1417320"/>
+          </a:xfrm>
+          <a:prstGeom prst="roundRect">
+            <a:avLst/>
+          </a:prstGeom>
+          <a:solidFill>
+            <a:srgbClr val="ECFEFF"/>
+          </a:solidFill>
+          <a:ln w="12700">
+            <a:solidFill>
+              <a:srgbClr val="06B6D4"/>
+            </a:solidFill>
+          </a:ln>
+        </p:spPr>
+        <p:style>
+          <a:lnRef idx="1">
+            <a:schemeClr val="accent1"/>
+          </a:lnRef>
+          <a:fillRef idx="3">
+            <a:schemeClr val="accent1"/>
+          </a:fillRef>
+          <a:effectRef idx="2">
+            <a:schemeClr val="accent1"/>
+          </a:effectRef>
+          <a:fontRef idx="minor">
+            <a:schemeClr val="lt1"/>
+          </a:fontRef>
+        </p:style>
+        <p:txBody>
+          <a:bodyPr rtlCol="0" anchor="ctr"/>
+          <a:lstStyle/>
+          <a:p>
+            <a:pPr algn="ctr"/>
+          </a:p>
+        </p:txBody>
+      </p:sp>
+      <p:sp>
+        <p:nvSpPr>
+          <p:cNvPr id="11" name="Rectangle 10"/>
+          <p:cNvSpPr/>
+          <p:nvPr/>
+        </p:nvSpPr>
+        <p:spPr>
+          <a:xfrm>
+            <a:off x="6199632" y="1865376"/>
+            <a:ext cx="82296" cy="1417320"/>
+          </a:xfrm>
+          <a:prstGeom prst="rect">
+            <a:avLst/>
+          </a:prstGeom>
+          <a:solidFill>
+            <a:srgbClr val="06B6D4"/>
+          </a:solidFill>
+          <a:ln>
+            <a:solidFill>
+              <a:srgbClr val="06B6D4"/>
+            </a:solidFill>
+          </a:ln>
+        </p:spPr>
+        <p:style>
+          <a:lnRef idx="1">
+            <a:schemeClr val="accent1"/>
+          </a:lnRef>
+          <a:fillRef idx="3">
+            <a:schemeClr val="accent1"/>
+          </a:fillRef>
+          <a:effectRef idx="2">
+            <a:schemeClr val="accent1"/>
+          </a:effectRef>
+          <a:fontRef idx="minor">
+            <a:schemeClr val="lt1"/>
+          </a:fontRef>
+        </p:style>
+        <p:txBody>
+          <a:bodyPr rtlCol="0" anchor="ctr"/>
+          <a:lstStyle/>
+          <a:p>
+            <a:pPr algn="ctr"/>
+          </a:p>
+        </p:txBody>
+      </p:sp>
+      <p:sp>
+        <p:nvSpPr>
+          <p:cNvPr id="12" name="TextBox 11"/>
+          <p:cNvSpPr txBox="1"/>
+          <p:nvPr/>
+        </p:nvSpPr>
+        <p:spPr>
+          <a:xfrm>
+            <a:off x="6364224" y="1975104"/>
+            <a:ext cx="4800600" cy="292608"/>
+          </a:xfrm>
+          <a:prstGeom prst="rect">
+            <a:avLst/>
+          </a:prstGeom>
+          <a:noFill/>
+        </p:spPr>
+        <p:txBody>
+          <a:bodyPr wrap="square" lIns="45720" rIns="45720">
+            <a:spAutoFit/>
+          </a:bodyPr>
+          <a:lstStyle/>
+          <a:p>
+            <a:pPr algn="l"/>
+            <a:r>
+              <a:rPr sz="1600" b="1">
+                <a:solidFill>
+                  <a:srgbClr val="06B6D4"/>
+                </a:solidFill>
+                <a:latin typeface="Aptos"/>
+              </a:rPr>
+              <a:t>CLEC1B: top DOWN-regulated gene by logFC</a:t>
+            </a:r>
+          </a:p>
+        </p:txBody>
+      </p:sp>
+      <p:sp>
+        <p:nvSpPr>
+          <p:cNvPr id="13" name="TextBox 12"/>
+          <p:cNvSpPr txBox="1"/>
+          <p:nvPr/>
+        </p:nvSpPr>
+        <p:spPr>
+          <a:xfrm>
+            <a:off x="6382512" y="2340864"/>
+            <a:ext cx="4754880" cy="850392"/>
+          </a:xfrm>
+          <a:prstGeom prst="rect">
+            <a:avLst/>
+          </a:prstGeom>
+          <a:noFill/>
+        </p:spPr>
+        <p:txBody>
+          <a:bodyPr wrap="square" lIns="73152" rIns="73152" tIns="27432" bIns="27432">
+            <a:spAutoFit/>
+          </a:bodyPr>
+          <a:lstStyle/>
+          <a:p>
+            <a:pPr>
+              <a:spcAft>
+                <a:spcPts val="400"/>
+              </a:spcAft>
+              <a:defRPr sz="1250">
+                <a:solidFill>
+                  <a:srgbClr val="111827"/>
+                </a:solidFill>
+                <a:latin typeface="Aptos"/>
+              </a:defRPr>
+            </a:pPr>
+            <a:r>
+              <a:t>Reported as a prognostic biomarker in HCC and associated with immune infiltration.</a:t>
+            </a:r>
+          </a:p>
+          <a:p>
+            <a:pPr>
+              <a:spcAft>
+                <a:spcPts val="400"/>
+              </a:spcAft>
+              <a:defRPr sz="1250">
+                <a:solidFill>
+                  <a:srgbClr val="111827"/>
+                </a:solidFill>
+                <a:latin typeface="Aptos"/>
+              </a:defRPr>
+            </a:pPr>
+            <a:r>
+              <a:t>Consistent with its strong reduction in tumor samples.</a:t>
+            </a:r>
+          </a:p>
+        </p:txBody>
+      </p:sp>
+      <p:sp>
+        <p:nvSpPr>
+          <p:cNvPr id="14" name="Rounded Rectangle 13"/>
+          <p:cNvSpPr/>
+          <p:nvPr/>
+        </p:nvSpPr>
+        <p:spPr>
+          <a:xfrm>
+            <a:off x="658368" y="3675887"/>
+            <a:ext cx="5074920" cy="1417320"/>
+          </a:xfrm>
+          <a:prstGeom prst="roundRect">
+            <a:avLst/>
+          </a:prstGeom>
+          <a:solidFill>
+            <a:srgbClr val="F0FDF4"/>
+          </a:solidFill>
+          <a:ln w="12700">
+            <a:solidFill>
+              <a:srgbClr val="16A34A"/>
+            </a:solidFill>
+          </a:ln>
+        </p:spPr>
+        <p:style>
+          <a:lnRef idx="1">
+            <a:schemeClr val="accent1"/>
+          </a:lnRef>
+          <a:fillRef idx="3">
+            <a:schemeClr val="accent1"/>
+          </a:fillRef>
+          <a:effectRef idx="2">
+            <a:schemeClr val="accent1"/>
+          </a:effectRef>
+          <a:fontRef idx="minor">
+            <a:schemeClr val="lt1"/>
+          </a:fontRef>
+        </p:style>
+        <p:txBody>
+          <a:bodyPr rtlCol="0" anchor="ctr"/>
+          <a:lstStyle/>
+          <a:p>
+            <a:pPr algn="ctr"/>
+          </a:p>
+        </p:txBody>
+      </p:sp>
+      <p:sp>
+        <p:nvSpPr>
+          <p:cNvPr id="15" name="Rectangle 14"/>
+          <p:cNvSpPr/>
+          <p:nvPr/>
+        </p:nvSpPr>
+        <p:spPr>
+          <a:xfrm>
+            <a:off x="658368" y="3675887"/>
+            <a:ext cx="82296" cy="1417320"/>
+          </a:xfrm>
+          <a:prstGeom prst="rect">
+            <a:avLst/>
+          </a:prstGeom>
+          <a:solidFill>
+            <a:srgbClr val="16A34A"/>
+          </a:solidFill>
+          <a:ln>
+            <a:solidFill>
+              <a:srgbClr val="16A34A"/>
+            </a:solidFill>
+          </a:ln>
+        </p:spPr>
+        <p:style>
+          <a:lnRef idx="1">
+            <a:schemeClr val="accent1"/>
+          </a:lnRef>
+          <a:fillRef idx="3">
+            <a:schemeClr val="accent1"/>
+          </a:fillRef>
+          <a:effectRef idx="2">
+            <a:schemeClr val="accent1"/>
+          </a:effectRef>
+          <a:fontRef idx="minor">
+            <a:schemeClr val="lt1"/>
+          </a:fontRef>
+        </p:style>
+        <p:txBody>
+          <a:bodyPr rtlCol="0" anchor="ctr"/>
+          <a:lstStyle/>
+          <a:p>
+            <a:pPr algn="ctr"/>
+          </a:p>
+        </p:txBody>
+      </p:sp>
+      <p:sp>
+        <p:nvSpPr>
+          <p:cNvPr id="16" name="TextBox 15"/>
+          <p:cNvSpPr txBox="1"/>
+          <p:nvPr/>
+        </p:nvSpPr>
+        <p:spPr>
+          <a:xfrm>
+            <a:off x="822960" y="3785615"/>
+            <a:ext cx="4800600" cy="292608"/>
+          </a:xfrm>
+          <a:prstGeom prst="rect">
+            <a:avLst/>
+          </a:prstGeom>
+          <a:noFill/>
+        </p:spPr>
+        <p:txBody>
+          <a:bodyPr wrap="square" lIns="45720" rIns="45720">
+            <a:spAutoFit/>
+          </a:bodyPr>
+          <a:lstStyle/>
+          <a:p>
+            <a:pPr algn="l"/>
+            <a:r>
+              <a:rPr sz="1600" b="1">
+                <a:solidFill>
+                  <a:srgbClr val="16A34A"/>
+                </a:solidFill>
+                <a:latin typeface="Aptos"/>
+              </a:rPr>
+              <a:t>CYP450 / drug metabolism loss</a:t>
+            </a:r>
+          </a:p>
+        </p:txBody>
+      </p:sp>
+      <p:sp>
+        <p:nvSpPr>
+          <p:cNvPr id="17" name="TextBox 16"/>
+          <p:cNvSpPr txBox="1"/>
+          <p:nvPr/>
+        </p:nvSpPr>
+        <p:spPr>
+          <a:xfrm>
+            <a:off x="841248" y="4151375"/>
+            <a:ext cx="4754880" cy="850392"/>
+          </a:xfrm>
+          <a:prstGeom prst="rect">
+            <a:avLst/>
+          </a:prstGeom>
+          <a:noFill/>
+        </p:spPr>
+        <p:txBody>
+          <a:bodyPr wrap="square" lIns="73152" rIns="73152" tIns="27432" bIns="27432">
+            <a:spAutoFit/>
+          </a:bodyPr>
+          <a:lstStyle/>
+          <a:p>
+            <a:pPr>
+              <a:spcAft>
+                <a:spcPts val="400"/>
+              </a:spcAft>
+              <a:defRPr sz="1250">
+                <a:solidFill>
+                  <a:srgbClr val="111827"/>
+                </a:solidFill>
+                <a:latin typeface="Aptos"/>
+              </a:defRPr>
+            </a:pPr>
+            <a:r>
+              <a:t>HCC literature reports down-regulation/deregulation of xenobiotic-metabolizing CYP genes.</a:t>
+            </a:r>
+          </a:p>
+          <a:p>
+            <a:pPr>
+              <a:spcAft>
+                <a:spcPts val="400"/>
+              </a:spcAft>
+              <a:defRPr sz="1250">
+                <a:solidFill>
+                  <a:srgbClr val="111827"/>
+                </a:solidFill>
+                <a:latin typeface="Aptos"/>
+              </a:defRPr>
+            </a:pPr>
+            <a:r>
+              <a:t>Supports loss of normal hepatocyte detoxification function.</a:t>
+            </a:r>
+          </a:p>
+        </p:txBody>
+      </p:sp>
+      <p:sp>
+        <p:nvSpPr>
+          <p:cNvPr id="18" name="Rounded Rectangle 17"/>
+          <p:cNvSpPr/>
+          <p:nvPr/>
+        </p:nvSpPr>
+        <p:spPr>
+          <a:xfrm>
+            <a:off x="6199632" y="3675887"/>
+            <a:ext cx="5074920" cy="1417320"/>
+          </a:xfrm>
+          <a:prstGeom prst="roundRect">
+            <a:avLst/>
+          </a:prstGeom>
+          <a:solidFill>
+            <a:srgbClr val="FFFBEB"/>
+          </a:solidFill>
+          <a:ln w="12700">
+            <a:solidFill>
+              <a:srgbClr val="F59E0B"/>
+            </a:solidFill>
+          </a:ln>
+        </p:spPr>
+        <p:style>
+          <a:lnRef idx="1">
+            <a:schemeClr val="accent1"/>
+          </a:lnRef>
+          <a:fillRef idx="3">
+            <a:schemeClr val="accent1"/>
+          </a:fillRef>
+          <a:effectRef idx="2">
+            <a:schemeClr val="accent1"/>
+          </a:effectRef>
+          <a:fontRef idx="minor">
+            <a:schemeClr val="lt1"/>
+          </a:fontRef>
+        </p:style>
+        <p:txBody>
+          <a:bodyPr rtlCol="0" anchor="ctr"/>
+          <a:lstStyle/>
+          <a:p>
+            <a:pPr algn="ctr"/>
+          </a:p>
+        </p:txBody>
+      </p:sp>
+      <p:sp>
+        <p:nvSpPr>
+          <p:cNvPr id="19" name="Rectangle 18"/>
+          <p:cNvSpPr/>
+          <p:nvPr/>
+        </p:nvSpPr>
+        <p:spPr>
+          <a:xfrm>
+            <a:off x="6199632" y="3675887"/>
+            <a:ext cx="82296" cy="1417320"/>
+          </a:xfrm>
+          <a:prstGeom prst="rect">
+            <a:avLst/>
+          </a:prstGeom>
+          <a:solidFill>
+            <a:srgbClr val="F59E0B"/>
+          </a:solidFill>
+          <a:ln>
+            <a:solidFill>
+              <a:srgbClr val="F59E0B"/>
+            </a:solidFill>
+          </a:ln>
+        </p:spPr>
+        <p:style>
+          <a:lnRef idx="1">
+            <a:schemeClr val="accent1"/>
+          </a:lnRef>
+          <a:fillRef idx="3">
+            <a:schemeClr val="accent1"/>
+          </a:fillRef>
+          <a:effectRef idx="2">
+            <a:schemeClr val="accent1"/>
+          </a:effectRef>
+          <a:fontRef idx="minor">
+            <a:schemeClr val="lt1"/>
+          </a:fontRef>
+        </p:style>
+        <p:txBody>
+          <a:bodyPr rtlCol="0" anchor="ctr"/>
+          <a:lstStyle/>
+          <a:p>
+            <a:pPr algn="ctr"/>
+          </a:p>
+        </p:txBody>
+      </p:sp>
+      <p:sp>
+        <p:nvSpPr>
+          <p:cNvPr id="20" name="TextBox 19"/>
+          <p:cNvSpPr txBox="1"/>
+          <p:nvPr/>
+        </p:nvSpPr>
+        <p:spPr>
+          <a:xfrm>
+            <a:off x="6364224" y="3785615"/>
+            <a:ext cx="4800600" cy="292608"/>
+          </a:xfrm>
+          <a:prstGeom prst="rect">
+            <a:avLst/>
+          </a:prstGeom>
+          <a:noFill/>
+        </p:spPr>
+        <p:txBody>
+          <a:bodyPr wrap="square" lIns="45720" rIns="45720">
+            <a:spAutoFit/>
+          </a:bodyPr>
+          <a:lstStyle/>
+          <a:p>
+            <a:pPr algn="l"/>
+            <a:r>
+              <a:rPr sz="1600" b="1">
+                <a:solidFill>
+                  <a:srgbClr val="F59E0B"/>
+                </a:solidFill>
+                <a:latin typeface="Aptos"/>
+              </a:rPr>
+              <a:t>miRNA-target findings</a:t>
+            </a:r>
+          </a:p>
+        </p:txBody>
+      </p:sp>
+      <p:sp>
+        <p:nvSpPr>
+          <p:cNvPr id="21" name="TextBox 20"/>
+          <p:cNvSpPr txBox="1"/>
+          <p:nvPr/>
+        </p:nvSpPr>
+        <p:spPr>
+          <a:xfrm>
+            <a:off x="6382512" y="4151375"/>
+            <a:ext cx="4754880" cy="850392"/>
+          </a:xfrm>
+          <a:prstGeom prst="rect">
+            <a:avLst/>
+          </a:prstGeom>
+          <a:noFill/>
+        </p:spPr>
+        <p:txBody>
+          <a:bodyPr wrap="square" lIns="73152" rIns="73152" tIns="27432" bIns="27432">
+            <a:spAutoFit/>
+          </a:bodyPr>
+          <a:lstStyle/>
+          <a:p>
+            <a:pPr>
+              <a:spcAft>
+                <a:spcPts val="400"/>
+              </a:spcAft>
+              <a:defRPr sz="1250">
+                <a:solidFill>
+                  <a:srgbClr val="111827"/>
+                </a:solidFill>
+                <a:latin typeface="Aptos"/>
+              </a:defRPr>
+            </a:pPr>
+            <a:r>
+              <a:t>miR-146a: immune/inflammatory and TLR/NF-kB-related signaling.</a:t>
+            </a:r>
+          </a:p>
+          <a:p>
+            <a:pPr>
+              <a:spcAft>
+                <a:spcPts val="400"/>
+              </a:spcAft>
+              <a:defRPr sz="1250">
+                <a:solidFill>
+                  <a:srgbClr val="111827"/>
+                </a:solidFill>
+                <a:latin typeface="Aptos"/>
+              </a:defRPr>
+            </a:pPr>
+            <a:r>
+              <a:t>miR-34a: p53-related miRNA linked to cell-cycle arrest, DNA-damage response, and apoptosis.</a:t>
+            </a:r>
+          </a:p>
+        </p:txBody>
+      </p:sp>
+      <p:sp>
+        <p:nvSpPr>
+          <p:cNvPr id="22" name="TextBox 21"/>
+          <p:cNvSpPr txBox="1"/>
+          <p:nvPr/>
+        </p:nvSpPr>
+        <p:spPr>
+          <a:xfrm>
+            <a:off x="777240" y="5330952"/>
+            <a:ext cx="9966960" cy="292608"/>
+          </a:xfrm>
+          <a:prstGeom prst="rect">
+            <a:avLst/>
+          </a:prstGeom>
+          <a:noFill/>
+        </p:spPr>
+        <p:txBody>
+          <a:bodyPr wrap="square" lIns="45720" rIns="45720">
+            <a:spAutoFit/>
+          </a:bodyPr>
+          <a:lstStyle/>
+          <a:p>
+            <a:pPr algn="l"/>
+            <a:r>
+              <a:rPr sz="1400" b="1">
+                <a:solidFill>
+                  <a:srgbClr val="0B1F33"/>
+                </a:solidFill>
+                <a:latin typeface="Aptos"/>
+              </a:rPr>
+              <a:t>Conclusion: findings are consistent with published HCC/cancer biology, but remain hypothesis-generating.</a:t>
+            </a:r>
+          </a:p>
+        </p:txBody>
+      </p:sp>
+      <p:sp>
+        <p:nvSpPr>
+          <p:cNvPr id="23" name="TextBox 22"/>
+          <p:cNvSpPr txBox="1"/>
+          <p:nvPr/>
+        </p:nvSpPr>
+        <p:spPr>
+          <a:xfrm>
+            <a:off x="658368" y="5760720"/>
+            <a:ext cx="9601200" cy="320040"/>
+          </a:xfrm>
+          <a:prstGeom prst="rect">
+            <a:avLst/>
+          </a:prstGeom>
+          <a:noFill/>
+        </p:spPr>
+        <p:txBody>
+          <a:bodyPr wrap="square" lIns="45720" rIns="45720">
+            <a:spAutoFit/>
+          </a:bodyPr>
+          <a:lstStyle/>
+          <a:p>
+            <a:pPr algn="l"/>
+            <a:r>
+              <a:rPr sz="950" b="0">
+                <a:solidFill>
+                  <a:srgbClr val="64748B"/>
+                </a:solidFill>
+                <a:latin typeface="Aptos"/>
+              </a:rPr>
+              <a:t>Selected examples: Sun et al. 2021; Liang et al. 2022; Nekvindova et al. 2020; Fu et al. 2023.</a:t>
+            </a:r>
+          </a:p>
+        </p:txBody>
+      </p:sp>
+      <p:sp>
+        <p:nvSpPr>
+          <p:cNvPr id="24" name="TextBox 23"/>
+          <p:cNvSpPr txBox="1"/>
+          <p:nvPr/>
+        </p:nvSpPr>
+        <p:spPr>
+          <a:xfrm>
+            <a:off x="594360" y="6510528"/>
+            <a:ext cx="7955279" cy="228600"/>
+          </a:xfrm>
+          <a:prstGeom prst="rect">
+            <a:avLst/>
+          </a:prstGeom>
+          <a:noFill/>
+        </p:spPr>
+        <p:txBody>
+          <a:bodyPr wrap="square" lIns="45720" rIns="45720">
+            <a:spAutoFit/>
+          </a:bodyPr>
+          <a:lstStyle/>
+          <a:p>
+            <a:pPr algn="l"/>
+            <a:r>
+              <a:rPr sz="950" b="0">
+                <a:solidFill>
+                  <a:srgbClr val="64748B"/>
+                </a:solidFill>
+                <a:latin typeface="Aptos"/>
+              </a:rPr>
+              <a:t>Gene expression data analysis • HCC tumor vs adjacent non-tumor liver</a:t>
+            </a:r>
+          </a:p>
+        </p:txBody>
+      </p:sp>
+      <p:sp>
+        <p:nvSpPr>
+          <p:cNvPr id="25" name="TextBox 24"/>
+          <p:cNvSpPr txBox="1"/>
+          <p:nvPr/>
+        </p:nvSpPr>
+        <p:spPr>
+          <a:xfrm>
+            <a:off x="11201400" y="6473952"/>
+            <a:ext cx="411480" cy="228600"/>
+          </a:xfrm>
+          <a:prstGeom prst="rect">
+            <a:avLst/>
+          </a:prstGeom>
+          <a:noFill/>
+        </p:spPr>
+        <p:txBody>
+          <a:bodyPr wrap="square" lIns="45720" rIns="45720">
+            <a:spAutoFit/>
+          </a:bodyPr>
+          <a:lstStyle/>
+          <a:p>
+            <a:pPr algn="r"/>
+            <a:r>
+              <a:rPr sz="1050" b="0">
+                <a:solidFill>
+                  <a:srgbClr val="64748B"/>
+                </a:solidFill>
+                <a:latin typeface="Aptos"/>
+              </a:rPr>
+              <a:t>11</a:t>
+            </a:r>
+          </a:p>
+        </p:txBody>
+      </p:sp>
+    </p:spTree>
+  </p:cSld>
+  <p:clrMapOvr>
+    <a:masterClrMapping/>
+  </p:clrMapOvr>
+</p:sld>
+</file>
+
+<file path=ppt/slides/slide12.xml><?xml version="1.0" encoding="utf-8"?>
 <p:sld xmlns:a="http://schemas.openxmlformats.org/drawingml/2006/main" xmlns:r="http://schemas.openxmlformats.org/officeDocument/2006/relationships" xmlns:p="http://schemas.openxmlformats.org/presentationml/2006/main">
   <p:cSld name="Slide 11">
     <p:bg>
@@ -3002,6 +4028,10 @@
             <a:prstDash val="solid"/>
           </a:ln>
         </p:spPr>
+        <p:txBody>
+          <a:bodyPr/>
+          <a:p/>
+        </p:txBody>
       </p:sp>
       <p:sp>
         <p:nvSpPr>
@@ -3031,6 +4061,10 @@
             <a:prstDash val="solid"/>
           </a:ln>
         </p:spPr>
+        <p:txBody>
+          <a:bodyPr/>
+          <a:p/>
+        </p:txBody>
       </p:sp>
       <p:sp>
         <p:nvSpPr>
@@ -3171,6 +4205,10 @@
             <a:tailEnd type="triangle"/>
           </a:ln>
         </p:spPr>
+        <p:txBody>
+          <a:bodyPr/>
+          <a:p/>
+        </p:txBody>
       </p:sp>
       <p:sp>
         <p:nvSpPr>
@@ -3200,6 +4238,10 @@
             <a:prstDash val="solid"/>
           </a:ln>
         </p:spPr>
+        <p:txBody>
+          <a:bodyPr/>
+          <a:p/>
+        </p:txBody>
       </p:sp>
       <p:sp>
         <p:nvSpPr>
@@ -3326,6 +4368,10 @@
             <a:tailEnd type="triangle"/>
           </a:ln>
         </p:spPr>
+        <p:txBody>
+          <a:bodyPr/>
+          <a:p/>
+        </p:txBody>
       </p:sp>
       <p:sp>
         <p:nvSpPr>
@@ -3355,6 +4401,10 @@
             <a:prstDash val="solid"/>
           </a:ln>
         </p:spPr>
+        <p:txBody>
+          <a:bodyPr/>
+          <a:p/>
+        </p:txBody>
       </p:sp>
       <p:sp>
         <p:nvSpPr>
@@ -3589,18 +4639,15 @@
           <a:bodyPr wrap="square" lIns="0" tIns="0" rIns="0" bIns="0" rtlCol="0" anchor="ctr"/>
           <a:lstStyle/>
           <a:p>
-            <a:pPr algn="r" indent="0" marL="0">
-              <a:buNone/>
-            </a:pPr>
-            <a:r>
-              <a:rPr lang="en-US" sz="850" dirty="0">
+            <a:r>
+              <a:rPr sz="1050">
                 <a:solidFill>
                   <a:srgbClr val="64748B"/>
                 </a:solidFill>
-              </a:rPr>
-              <a:t>11</a:t>
-            </a:r>
-            <a:endParaRPr lang="en-US" sz="850" dirty="0"/>
+                <a:latin typeface="Aptos"/>
+              </a:rPr>
+              <a:t>12</a:t>
+            </a:r>
           </a:p>
         </p:txBody>
       </p:sp>
@@ -3612,7 +4659,7 @@
 </p:sld>
 </file>
 
-<file path=ppt/slides/slide12.xml><?xml version="1.0" encoding="utf-8"?>
+<file path=ppt/slides/slide13.xml><?xml version="1.0" encoding="utf-8"?>
 <p:sld xmlns:a="http://schemas.openxmlformats.org/drawingml/2006/main" xmlns:r="http://schemas.openxmlformats.org/officeDocument/2006/relationships" xmlns:p="http://schemas.openxmlformats.org/presentationml/2006/main">
   <p:cSld name="Slide 12">
     <p:bg>
@@ -3738,6 +4785,10 @@
             <a:prstDash val="solid"/>
           </a:ln>
         </p:spPr>
+        <p:txBody>
+          <a:bodyPr/>
+          <a:p/>
+        </p:txBody>
       </p:sp>
       <p:sp>
         <p:nvSpPr>
@@ -4007,6 +5058,10 @@
             <a:prstDash val="solid"/>
           </a:ln>
         </p:spPr>
+        <p:txBody>
+          <a:bodyPr/>
+          <a:p/>
+        </p:txBody>
       </p:sp>
       <p:sp>
         <p:nvSpPr>
@@ -4139,18 +5194,15 @@
           <a:bodyPr wrap="square" lIns="0" tIns="0" rIns="0" bIns="0" rtlCol="0" anchor="ctr"/>
           <a:lstStyle/>
           <a:p>
-            <a:pPr algn="r" indent="0" marL="0">
-              <a:buNone/>
-            </a:pPr>
-            <a:r>
-              <a:rPr lang="en-US" sz="850" dirty="0">
+            <a:r>
+              <a:rPr sz="1050">
                 <a:solidFill>
                   <a:srgbClr val="64748B"/>
                 </a:solidFill>
-              </a:rPr>
-              <a:t>12</a:t>
-            </a:r>
-            <a:endParaRPr lang="en-US" sz="850" dirty="0"/>
+                <a:latin typeface="Aptos"/>
+              </a:rPr>
+              <a:t>13</a:t>
+            </a:r>
           </a:p>
         </p:txBody>
       </p:sp>
